--- a/運用/説明会/説明会_3コース_2026年10月期_v2.pptx
+++ b/運用/説明会/説明会_3コース_2026年10月期_v2.pptx
@@ -5959,7 +5959,7 @@
               <a:buNone/>
             </a:pPr>
             <a:r>
-              <a:rPr lang="en-US" sz="1300" dirty="0">
+              <a:rPr lang="en-US" sz="1200" dirty="0">
                 <a:solidFill>
                   <a:srgbClr val="6D2E46"/>
                 </a:solidFill>
@@ -5967,9 +5967,9 @@
                 <a:ea typeface="Calibri" pitchFamily="34" charset="-122"/>
                 <a:cs typeface="Calibri" pitchFamily="34" charset="-120"/>
               </a:rPr>
-              <a:t>全コース共通　質問し放題（48時間以内）／動画講座の会員サイト見放題／アーカイブ視聴可／セルフコーチング／動画撮影会1回</a:t>
-            </a:r>
-            <a:endParaRPr lang="en-US" sz="1300" dirty="0"/>
+              <a:t>全コース共通　質問し放題（48時間以内）／動画講座の会員サイト見放題／アーカイブ視聴可／セルフコーチング／勉強会へご招待／動画撮影会1回</a:t>
+            </a:r>
+            <a:endParaRPr lang="en-US" sz="1200" dirty="0"/>
           </a:p>
         </p:txBody>
       </p:sp>
@@ -6612,7 +6612,7 @@
               <a:buNone/>
             </a:pPr>
             <a:r>
-              <a:rPr lang="en-US" sz="1300" dirty="0">
+              <a:rPr lang="en-US" sz="1200" dirty="0">
                 <a:solidFill>
                   <a:srgbClr val="6D2E46"/>
                 </a:solidFill>
@@ -6620,9 +6620,9 @@
                 <a:ea typeface="Calibri" pitchFamily="34" charset="-122"/>
                 <a:cs typeface="Calibri" pitchFamily="34" charset="-120"/>
               </a:rPr>
-              <a:t>全コース共通　質問し放題（48時間以内）／動画講座の会員サイト見放題／アーカイブ視聴可／セルフコーチング／動画撮影会1回</a:t>
-            </a:r>
-            <a:endParaRPr lang="en-US" sz="1300" dirty="0"/>
+              <a:t>全コース共通　質問し放題（48時間以内）／動画講座の会員サイト見放題／アーカイブ視聴可／セルフコーチング／勉強会へご招待／動画撮影会1回</a:t>
+            </a:r>
+            <a:endParaRPr lang="en-US" sz="1200" dirty="0"/>
           </a:p>
         </p:txBody>
       </p:sp>
@@ -7304,7 +7304,7 @@
               <a:buNone/>
             </a:pPr>
             <a:r>
-              <a:rPr lang="en-US" sz="1300" dirty="0">
+              <a:rPr lang="en-US" sz="1200" dirty="0">
                 <a:solidFill>
                   <a:srgbClr val="6D2E46"/>
                 </a:solidFill>
@@ -7312,9 +7312,9 @@
                 <a:ea typeface="Calibri" pitchFamily="34" charset="-122"/>
                 <a:cs typeface="Calibri" pitchFamily="34" charset="-120"/>
               </a:rPr>
-              <a:t>全コース共通　質問し放題（48時間以内）／動画講座の会員サイト見放題／アーカイブ視聴可／セルフコーチング／動画撮影会1回</a:t>
-            </a:r>
-            <a:endParaRPr lang="en-US" sz="1300" dirty="0"/>
+              <a:t>全コース共通　質問し放題（48時間以内）／動画講座の会員サイト見放題／アーカイブ視聴可／セルフコーチング／勉強会へご招待／動画撮影会1回</a:t>
+            </a:r>
+            <a:endParaRPr lang="en-US" sz="1200" dirty="0"/>
           </a:p>
         </p:txBody>
       </p:sp>
@@ -11511,7 +11511,7 @@
         <p:spPr>
           <a:xfrm>
             <a:off x="6126480" y="1920240"/>
-            <a:ext cx="0" cy="3017520"/>
+            <a:ext cx="0" cy="3291840"/>
           </a:xfrm>
           <a:prstGeom prst="line">
             <a:avLst/>
@@ -11572,102 +11572,167 @@
         </p:nvSpPr>
         <p:spPr>
           <a:xfrm>
-            <a:off x="6583680" y="2624328"/>
-            <a:ext cx="365760" cy="365760"/>
-          </a:xfrm>
-          <a:prstGeom prst="rect">
-            <a:avLst/>
-          </a:prstGeom>
-          <a:noFill/>
-          <a:ln/>
-        </p:spPr>
-        <p:txBody>
-          <a:bodyPr wrap="square" lIns="0" tIns="0" rIns="0" bIns="0" rtlCol="0" anchor="ctr"/>
-          <a:lstStyle/>
-          <a:p>
-            <a:pPr indent="0" marL="0">
-              <a:buNone/>
-            </a:pPr>
-            <a:r>
-              <a:rPr lang="en-US" sz="1600" b="1" dirty="0">
+            <a:off x="6583680" y="2514600"/>
+            <a:ext cx="4846320" cy="411480"/>
+          </a:xfrm>
+          <a:prstGeom prst="rect">
+            <a:avLst/>
+          </a:prstGeom>
+          <a:noFill/>
+          <a:ln/>
+        </p:spPr>
+        <p:txBody>
+          <a:bodyPr wrap="square" lIns="0" tIns="0" rIns="0" bIns="0" rtlCol="0" anchor="ctr"/>
+          <a:lstStyle/>
+          <a:p>
+            <a:pPr indent="0" marL="0">
+              <a:buNone/>
+            </a:pPr>
+            <a:r>
+              <a:rPr lang="en-US" sz="1500" b="1" dirty="0">
+                <a:solidFill>
+                  <a:srgbClr val="332B29"/>
+                </a:solidFill>
+                <a:latin typeface="Calibri" pitchFamily="34" charset="0"/>
+                <a:ea typeface="Calibri" pitchFamily="34" charset="-122"/>
+                <a:cs typeface="Calibri" pitchFamily="34" charset="-120"/>
+              </a:rPr>
+              <a:t>一緒にインスタライブ／アカウント共有でご紹介</a:t>
+            </a:r>
+            <a:endParaRPr lang="en-US" sz="1500" dirty="0"/>
+          </a:p>
+        </p:txBody>
+      </p:sp>
+      <p:sp>
+        <p:nvSpPr>
+          <p:cNvPr id="10" name="Text 8"/>
+          <p:cNvSpPr txBox="1"/>
+          <p:nvPr/>
+        </p:nvSpPr>
+        <p:spPr>
+          <a:xfrm>
+            <a:off x="6583680" y="2926080"/>
+            <a:ext cx="4846320" cy="365760"/>
+          </a:xfrm>
+          <a:prstGeom prst="rect">
+            <a:avLst/>
+          </a:prstGeom>
+          <a:noFill/>
+          <a:ln/>
+        </p:spPr>
+        <p:txBody>
+          <a:bodyPr wrap="square" lIns="0" tIns="0" rIns="0" bIns="0" rtlCol="0" anchor="ctr"/>
+          <a:lstStyle/>
+          <a:p>
+            <a:pPr indent="0" marL="0">
+              <a:buNone/>
+            </a:pPr>
+            <a:r>
+              <a:rPr lang="en-US" sz="1200" dirty="0">
+                <a:solidFill>
+                  <a:srgbClr val="6A5A5E"/>
+                </a:solidFill>
+                <a:latin typeface="Calibri" pitchFamily="34" charset="0"/>
+                <a:ea typeface="Calibri" pitchFamily="34" charset="-122"/>
+                <a:cs typeface="Calibri" pitchFamily="34" charset="-120"/>
+              </a:rPr>
+              <a:t>アメブロ 2,600名／インスタ 8,500名程度にお届けします。</a:t>
+            </a:r>
+            <a:endParaRPr lang="en-US" sz="1200" dirty="0"/>
+          </a:p>
+        </p:txBody>
+      </p:sp>
+      <p:sp>
+        <p:nvSpPr>
+          <p:cNvPr id="11" name="Shape 9"/>
+          <p:cNvSpPr/>
+          <p:nvPr/>
+        </p:nvSpPr>
+        <p:spPr>
+          <a:xfrm>
+            <a:off x="6583680" y="3474720"/>
+            <a:ext cx="4846320" cy="0"/>
+          </a:xfrm>
+          <a:prstGeom prst="line">
+            <a:avLst/>
+          </a:prstGeom>
+          <a:noFill/>
+          <a:ln w="12700">
+            <a:solidFill>
+              <a:srgbClr val="E0D6D2"/>
+            </a:solidFill>
+            <a:prstDash val="solid"/>
+          </a:ln>
+        </p:spPr>
+      </p:sp>
+      <p:sp>
+        <p:nvSpPr>
+          <p:cNvPr id="12" name="Text 10"/>
+          <p:cNvSpPr txBox="1"/>
+          <p:nvPr/>
+        </p:nvSpPr>
+        <p:spPr>
+          <a:xfrm>
+            <a:off x="6583680" y="3611880"/>
+            <a:ext cx="4846320" cy="365760"/>
+          </a:xfrm>
+          <a:prstGeom prst="rect">
+            <a:avLst/>
+          </a:prstGeom>
+          <a:noFill/>
+          <a:ln/>
+        </p:spPr>
+        <p:txBody>
+          <a:bodyPr wrap="square" lIns="0" tIns="0" rIns="0" bIns="0" rtlCol="0" anchor="ctr"/>
+          <a:lstStyle/>
+          <a:p>
+            <a:pPr indent="0" marL="0">
+              <a:buNone/>
+            </a:pPr>
+            <a:r>
+              <a:rPr lang="en-US" sz="1300" b="1" dirty="0">
                 <a:solidFill>
                   <a:srgbClr val="A26769"/>
                 </a:solidFill>
-                <a:latin typeface="Cambria" pitchFamily="34" charset="0"/>
-                <a:ea typeface="Cambria" pitchFamily="34" charset="-122"/>
-                <a:cs typeface="Cambria" pitchFamily="34" charset="-120"/>
-              </a:rPr>
-              <a:t>一</a:t>
-            </a:r>
-            <a:endParaRPr lang="en-US" sz="1600" dirty="0"/>
-          </a:p>
-        </p:txBody>
-      </p:sp>
-      <p:sp>
-        <p:nvSpPr>
-          <p:cNvPr id="10" name="Text 8"/>
-          <p:cNvSpPr txBox="1"/>
-          <p:nvPr/>
-        </p:nvSpPr>
-        <p:spPr>
-          <a:xfrm>
-            <a:off x="7040880" y="2606040"/>
-            <a:ext cx="4389120" cy="365760"/>
-          </a:xfrm>
-          <a:prstGeom prst="rect">
-            <a:avLst/>
-          </a:prstGeom>
-          <a:noFill/>
-          <a:ln/>
-        </p:spPr>
-        <p:txBody>
-          <a:bodyPr wrap="square" lIns="0" tIns="0" rIns="0" bIns="0" rtlCol="0" anchor="ctr"/>
-          <a:lstStyle/>
-          <a:p>
-            <a:pPr indent="0" marL="0">
-              <a:buNone/>
-            </a:pPr>
-            <a:r>
-              <a:rPr lang="en-US" sz="1400" b="1" dirty="0">
-                <a:solidFill>
-                  <a:srgbClr val="332B29"/>
-                </a:solidFill>
-                <a:latin typeface="Calibri" pitchFamily="34" charset="0"/>
-                <a:ea typeface="Calibri" pitchFamily="34" charset="-122"/>
-                <a:cs typeface="Calibri" pitchFamily="34" charset="-120"/>
-              </a:rPr>
-              <a:t>一緒にインスタライブ／アカウント共有でご紹介</a:t>
-            </a:r>
-            <a:endParaRPr lang="en-US" sz="1400" dirty="0"/>
-          </a:p>
-        </p:txBody>
-      </p:sp>
-      <p:sp>
-        <p:nvSpPr>
-          <p:cNvPr id="11" name="Text 9"/>
-          <p:cNvSpPr txBox="1"/>
-          <p:nvPr/>
-        </p:nvSpPr>
-        <p:spPr>
-          <a:xfrm>
-            <a:off x="7040880" y="2953512"/>
-            <a:ext cx="4389120" cy="320040"/>
-          </a:xfrm>
-          <a:prstGeom prst="rect">
-            <a:avLst/>
-          </a:prstGeom>
-          <a:noFill/>
-          <a:ln/>
-        </p:spPr>
-        <p:txBody>
-          <a:bodyPr wrap="square" lIns="0" tIns="0" rIns="0" bIns="0" rtlCol="0" anchor="ctr"/>
-          <a:lstStyle/>
-          <a:p>
-            <a:pPr indent="0" marL="0">
-              <a:buNone/>
-            </a:pPr>
-            <a:r>
-              <a:rPr lang="en-US" sz="1100" dirty="0">
+                <a:latin typeface="Calibri" pitchFamily="34" charset="0"/>
+                <a:ea typeface="Calibri" pitchFamily="34" charset="-122"/>
+                <a:cs typeface="Calibri" pitchFamily="34" charset="-120"/>
+              </a:rPr>
+              <a:t>こちらは、はじめから全コースに入っています</a:t>
+            </a:r>
+            <a:endParaRPr lang="en-US" sz="1300" dirty="0"/>
+          </a:p>
+        </p:txBody>
+      </p:sp>
+      <p:sp>
+        <p:nvSpPr>
+          <p:cNvPr id="13" name="Text 11"/>
+          <p:cNvSpPr txBox="1"/>
+          <p:nvPr/>
+        </p:nvSpPr>
+        <p:spPr>
+          <a:xfrm>
+            <a:off x="6583680" y="4023360"/>
+            <a:ext cx="4846320" cy="2011680"/>
+          </a:xfrm>
+          <a:prstGeom prst="rect">
+            <a:avLst/>
+          </a:prstGeom>
+          <a:noFill/>
+          <a:ln/>
+        </p:spPr>
+        <p:txBody>
+          <a:bodyPr wrap="square" lIns="0" tIns="0" rIns="0" bIns="0" rtlCol="0" anchor="t"/>
+          <a:lstStyle/>
+          <a:p>
+            <a:pPr indent="0" marL="0">
+              <a:lnSpc>
+                <a:spcPts val="2000"/>
+              </a:lnSpc>
+              <a:buNone/>
+            </a:pPr>
+            <a:r>
+              <a:rPr lang="en-US" sz="1150" dirty="0">
                 <a:solidFill>
                   <a:srgbClr val="6A5A5E"/>
                 </a:solidFill>
@@ -11675,210 +11740,75 @@
                 <a:ea typeface="Calibri" pitchFamily="34" charset="-122"/>
                 <a:cs typeface="Calibri" pitchFamily="34" charset="-120"/>
               </a:rPr>
-              <a:t>アメブロ 2,600名／インスタ 8,500名程度</a:t>
-            </a:r>
-            <a:endParaRPr lang="en-US" sz="1100" dirty="0"/>
-          </a:p>
-        </p:txBody>
-      </p:sp>
-      <p:sp>
-        <p:nvSpPr>
-          <p:cNvPr id="12" name="Text 10"/>
-          <p:cNvSpPr txBox="1"/>
-          <p:nvPr/>
-        </p:nvSpPr>
-        <p:spPr>
-          <a:xfrm>
-            <a:off x="6583680" y="3429000"/>
-            <a:ext cx="365760" cy="365760"/>
-          </a:xfrm>
-          <a:prstGeom prst="rect">
-            <a:avLst/>
-          </a:prstGeom>
-          <a:noFill/>
-          <a:ln/>
-        </p:spPr>
-        <p:txBody>
-          <a:bodyPr wrap="square" lIns="0" tIns="0" rIns="0" bIns="0" rtlCol="0" anchor="ctr"/>
-          <a:lstStyle/>
-          <a:p>
-            <a:pPr indent="0" marL="0">
-              <a:buNone/>
-            </a:pPr>
-            <a:r>
-              <a:rPr lang="en-US" sz="1600" b="1" dirty="0">
-                <a:solidFill>
-                  <a:srgbClr val="A26769"/>
-                </a:solidFill>
-                <a:latin typeface="Cambria" pitchFamily="34" charset="0"/>
-                <a:ea typeface="Cambria" pitchFamily="34" charset="-122"/>
-                <a:cs typeface="Cambria" pitchFamily="34" charset="-120"/>
-              </a:rPr>
-              <a:t>二</a:t>
-            </a:r>
-            <a:endParaRPr lang="en-US" sz="1600" dirty="0"/>
-          </a:p>
-        </p:txBody>
-      </p:sp>
-      <p:sp>
-        <p:nvSpPr>
-          <p:cNvPr id="13" name="Text 11"/>
-          <p:cNvSpPr txBox="1"/>
-          <p:nvPr/>
-        </p:nvSpPr>
-        <p:spPr>
-          <a:xfrm>
-            <a:off x="7040880" y="3410712"/>
-            <a:ext cx="4389120" cy="365760"/>
-          </a:xfrm>
-          <a:prstGeom prst="rect">
-            <a:avLst/>
-          </a:prstGeom>
-          <a:noFill/>
-          <a:ln/>
-        </p:spPr>
-        <p:txBody>
-          <a:bodyPr wrap="square" lIns="0" tIns="0" rIns="0" bIns="0" rtlCol="0" anchor="ctr"/>
-          <a:lstStyle/>
-          <a:p>
-            <a:pPr indent="0" marL="0">
-              <a:buNone/>
-            </a:pPr>
-            <a:r>
-              <a:rPr lang="en-US" sz="1400" b="1" dirty="0">
-                <a:solidFill>
-                  <a:srgbClr val="332B29"/>
-                </a:solidFill>
-                <a:latin typeface="Calibri" pitchFamily="34" charset="0"/>
-                <a:ea typeface="Calibri" pitchFamily="34" charset="-122"/>
-                <a:cs typeface="Calibri" pitchFamily="34" charset="-120"/>
-              </a:rPr>
-              <a:t>勉強会へ無料でご招待</a:t>
-            </a:r>
-            <a:endParaRPr lang="en-US" sz="1400" dirty="0"/>
+              <a:t>質問し放題（48時間以内）／動画講座の会員サイト見放題</a:t>
+            </a:r>
+            <a:endParaRPr lang="en-US" sz="1150" dirty="0"/>
+          </a:p>
+          <a:p>
+            <a:pPr indent="0" marL="0">
+              <a:lnSpc>
+                <a:spcPts val="2000"/>
+              </a:lnSpc>
+              <a:buNone/>
+            </a:pPr>
+            <a:r>
+              <a:rPr lang="en-US" sz="1150" dirty="0">
+                <a:solidFill>
+                  <a:srgbClr val="6A5A5E"/>
+                </a:solidFill>
+                <a:latin typeface="Calibri" pitchFamily="34" charset="0"/>
+                <a:ea typeface="Calibri" pitchFamily="34" charset="-122"/>
+                <a:cs typeface="Calibri" pitchFamily="34" charset="-120"/>
+              </a:rPr>
+              <a:t>アーカイブ視聴可／セルフコーチング</a:t>
+            </a:r>
+            <a:endParaRPr lang="en-US" sz="1150" dirty="0"/>
+          </a:p>
+          <a:p>
+            <a:pPr indent="0" marL="0">
+              <a:lnSpc>
+                <a:spcPts val="2000"/>
+              </a:lnSpc>
+              <a:buNone/>
+            </a:pPr>
+            <a:r>
+              <a:rPr lang="en-US" sz="1150" dirty="0">
+                <a:solidFill>
+                  <a:srgbClr val="6A5A5E"/>
+                </a:solidFill>
+                <a:latin typeface="Calibri" pitchFamily="34" charset="0"/>
+                <a:ea typeface="Calibri" pitchFamily="34" charset="-122"/>
+                <a:cs typeface="Calibri" pitchFamily="34" charset="-120"/>
+              </a:rPr>
+              <a:t>勉強会へご招待</a:t>
+            </a:r>
+            <a:endParaRPr lang="en-US" sz="1150" dirty="0"/>
+          </a:p>
+          <a:p>
+            <a:pPr indent="0" marL="0">
+              <a:lnSpc>
+                <a:spcPts val="2000"/>
+              </a:lnSpc>
+              <a:buNone/>
+            </a:pPr>
+            <a:r>
+              <a:rPr lang="en-US" sz="1150" dirty="0">
+                <a:solidFill>
+                  <a:srgbClr val="6A5A5E"/>
+                </a:solidFill>
+                <a:latin typeface="Calibri" pitchFamily="34" charset="0"/>
+                <a:ea typeface="Calibri" pitchFamily="34" charset="-122"/>
+                <a:cs typeface="Calibri" pitchFamily="34" charset="-120"/>
+              </a:rPr>
+              <a:t>動画撮影会 1回（丸の内・2時間。撮影は卒業生がお手伝いします）</a:t>
+            </a:r>
+            <a:endParaRPr lang="en-US" sz="1150" dirty="0"/>
           </a:p>
         </p:txBody>
       </p:sp>
       <p:sp>
         <p:nvSpPr>
           <p:cNvPr id="14" name="Text 12"/>
-          <p:cNvSpPr txBox="1"/>
-          <p:nvPr/>
-        </p:nvSpPr>
-        <p:spPr>
-          <a:xfrm>
-            <a:off x="6583680" y="4233672"/>
-            <a:ext cx="365760" cy="365760"/>
-          </a:xfrm>
-          <a:prstGeom prst="rect">
-            <a:avLst/>
-          </a:prstGeom>
-          <a:noFill/>
-          <a:ln/>
-        </p:spPr>
-        <p:txBody>
-          <a:bodyPr wrap="square" lIns="0" tIns="0" rIns="0" bIns="0" rtlCol="0" anchor="ctr"/>
-          <a:lstStyle/>
-          <a:p>
-            <a:pPr indent="0" marL="0">
-              <a:buNone/>
-            </a:pPr>
-            <a:r>
-              <a:rPr lang="en-US" sz="1600" b="1" dirty="0">
-                <a:solidFill>
-                  <a:srgbClr val="A26769"/>
-                </a:solidFill>
-                <a:latin typeface="Cambria" pitchFamily="34" charset="0"/>
-                <a:ea typeface="Cambria" pitchFamily="34" charset="-122"/>
-                <a:cs typeface="Cambria" pitchFamily="34" charset="-120"/>
-              </a:rPr>
-              <a:t>三</a:t>
-            </a:r>
-            <a:endParaRPr lang="en-US" sz="1600" dirty="0"/>
-          </a:p>
-        </p:txBody>
-      </p:sp>
-      <p:sp>
-        <p:nvSpPr>
-          <p:cNvPr id="15" name="Text 13"/>
-          <p:cNvSpPr txBox="1"/>
-          <p:nvPr/>
-        </p:nvSpPr>
-        <p:spPr>
-          <a:xfrm>
-            <a:off x="7040880" y="4215384"/>
-            <a:ext cx="4389120" cy="365760"/>
-          </a:xfrm>
-          <a:prstGeom prst="rect">
-            <a:avLst/>
-          </a:prstGeom>
-          <a:noFill/>
-          <a:ln/>
-        </p:spPr>
-        <p:txBody>
-          <a:bodyPr wrap="square" lIns="0" tIns="0" rIns="0" bIns="0" rtlCol="0" anchor="ctr"/>
-          <a:lstStyle/>
-          <a:p>
-            <a:pPr indent="0" marL="0">
-              <a:buNone/>
-            </a:pPr>
-            <a:r>
-              <a:rPr lang="en-US" sz="1400" b="1" dirty="0">
-                <a:solidFill>
-                  <a:srgbClr val="332B29"/>
-                </a:solidFill>
-                <a:latin typeface="Calibri" pitchFamily="34" charset="0"/>
-                <a:ea typeface="Calibri" pitchFamily="34" charset="-122"/>
-                <a:cs typeface="Calibri" pitchFamily="34" charset="-120"/>
-              </a:rPr>
-              <a:t>動画撮影会 1回 無料でご招待</a:t>
-            </a:r>
-            <a:endParaRPr lang="en-US" sz="1400" dirty="0"/>
-          </a:p>
-        </p:txBody>
-      </p:sp>
-      <p:sp>
-        <p:nvSpPr>
-          <p:cNvPr id="16" name="Text 14"/>
-          <p:cNvSpPr txBox="1"/>
-          <p:nvPr/>
-        </p:nvSpPr>
-        <p:spPr>
-          <a:xfrm>
-            <a:off x="7040880" y="4562856"/>
-            <a:ext cx="4389120" cy="320040"/>
-          </a:xfrm>
-          <a:prstGeom prst="rect">
-            <a:avLst/>
-          </a:prstGeom>
-          <a:noFill/>
-          <a:ln/>
-        </p:spPr>
-        <p:txBody>
-          <a:bodyPr wrap="square" lIns="0" tIns="0" rIns="0" bIns="0" rtlCol="0" anchor="ctr"/>
-          <a:lstStyle/>
-          <a:p>
-            <a:pPr indent="0" marL="0">
-              <a:buNone/>
-            </a:pPr>
-            <a:r>
-              <a:rPr lang="en-US" sz="1100" dirty="0">
-                <a:solidFill>
-                  <a:srgbClr val="6A5A5E"/>
-                </a:solidFill>
-                <a:latin typeface="Calibri" pitchFamily="34" charset="0"/>
-                <a:ea typeface="Calibri" pitchFamily="34" charset="-122"/>
-                <a:cs typeface="Calibri" pitchFamily="34" charset="-120"/>
-              </a:rPr>
-              <a:t>丸の内・2時間。撮影は卒業生がお手伝いします</a:t>
-            </a:r>
-            <a:endParaRPr lang="en-US" sz="1100" dirty="0"/>
-          </a:p>
-        </p:txBody>
-      </p:sp>
-      <p:sp>
-        <p:nvSpPr>
-          <p:cNvPr id="17" name="Text 15"/>
           <p:cNvSpPr txBox="1"/>
           <p:nvPr/>
         </p:nvSpPr>

--- a/運用/説明会/説明会_3コース_2026年10月期_v2.pptx
+++ b/運用/説明会/説明会_3コース_2026年10月期_v2.pptx
@@ -5967,7 +5967,7 @@
                 <a:ea typeface="Calibri" pitchFamily="34" charset="-122"/>
                 <a:cs typeface="Calibri" pitchFamily="34" charset="-120"/>
               </a:rPr>
-              <a:t>全コース共通　質問し放題（48時間以内）／動画講座の会員サイト見放題／アーカイブ視聴可／セルフコーチング／勉強会へご招待／動画撮影会1回</a:t>
+              <a:t>全コース共通　質問し放題（48時間以内）／会員サイト見放題／アーカイブ視聴可／セルフコーチング／受講生の勉強会／動画撮影会1回</a:t>
             </a:r>
             <a:endParaRPr lang="en-US" sz="1200" dirty="0"/>
           </a:p>
@@ -6620,7 +6620,7 @@
                 <a:ea typeface="Calibri" pitchFamily="34" charset="-122"/>
                 <a:cs typeface="Calibri" pitchFamily="34" charset="-120"/>
               </a:rPr>
-              <a:t>全コース共通　質問し放題（48時間以内）／動画講座の会員サイト見放題／アーカイブ視聴可／セルフコーチング／勉強会へご招待／動画撮影会1回</a:t>
+              <a:t>全コース共通　質問し放題（48時間以内）／会員サイト見放題／アーカイブ視聴可／セルフコーチング／受講生の勉強会／動画撮影会1回</a:t>
             </a:r>
             <a:endParaRPr lang="en-US" sz="1200" dirty="0"/>
           </a:p>
@@ -7312,7 +7312,7 @@
                 <a:ea typeface="Calibri" pitchFamily="34" charset="-122"/>
                 <a:cs typeface="Calibri" pitchFamily="34" charset="-120"/>
               </a:rPr>
-              <a:t>全コース共通　質問し放題（48時間以内）／動画講座の会員サイト見放題／アーカイブ視聴可／セルフコーチング／勉強会へご招待／動画撮影会1回</a:t>
+              <a:t>全コース共通　質問し放題（48時間以内）／会員サイト見放題／アーカイブ視聴可／セルフコーチング／受講生の勉強会／動画撮影会1回</a:t>
             </a:r>
             <a:endParaRPr lang="en-US" sz="1200" dirty="0"/>
           </a:p>
@@ -11780,7 +11780,7 @@
                 <a:ea typeface="Calibri" pitchFamily="34" charset="-122"/>
                 <a:cs typeface="Calibri" pitchFamily="34" charset="-120"/>
               </a:rPr>
-              <a:t>勉強会へご招待</a:t>
+              <a:t>受講生の勉強会へご招待（無料の入口の勉強会とは別のものです）</a:t>
             </a:r>
             <a:endParaRPr lang="en-US" sz="1150" dirty="0"/>
           </a:p>

--- a/運用/説明会/説明会_3コース_2026年10月期_v2.pptx
+++ b/運用/説明会/説明会_3コース_2026年10月期_v2.pptx
@@ -5763,7 +5763,7 @@
                 <a:ea typeface="Calibri" pitchFamily="34" charset="-122"/>
                 <a:cs typeface="Calibri" pitchFamily="34" charset="-120"/>
               </a:rPr>
-              <a:t>動画講座の会員サイト</a:t>
+              <a:t>動画講座の会員サイト（開講から1年間）</a:t>
             </a:r>
             <a:endParaRPr lang="en-US" sz="1350" dirty="0"/>
           </a:p>
@@ -5783,7 +5783,7 @@
                 <a:ea typeface="Calibri" pitchFamily="34" charset="-122"/>
                 <a:cs typeface="Calibri" pitchFamily="34" charset="-120"/>
               </a:rPr>
-              <a:t>ご質問へのお返事（48時間以内）</a:t>
+              <a:t>ご質問へのお返事（48時間以内・受講期間中）</a:t>
             </a:r>
             <a:endParaRPr lang="en-US" sz="1350" dirty="0"/>
           </a:p>
@@ -6761,7 +6761,7 @@
                 <a:ea typeface="Calibri" pitchFamily="34" charset="-122"/>
                 <a:cs typeface="Calibri" pitchFamily="34" charset="-120"/>
               </a:rPr>
-              <a:t>全コース共通　質問し放題（48時間以内）／会員サイト見放題／アーカイブ視聴可／セルフコーチング／受講生の勉強会／動画撮影会1回</a:t>
+              <a:t>全コース共通　質問し放題（48時間以内）／会員サイトとアーカイブは開講から1年間／セルフコーチング／受講生の勉強会／動画撮影会1回</a:t>
             </a:r>
             <a:endParaRPr lang="en-US" sz="1200" dirty="0"/>
           </a:p>
@@ -6800,7 +6800,7 @@
                 <a:ea typeface="Calibri" pitchFamily="34" charset="-122"/>
                 <a:cs typeface="Calibri" pitchFamily="34" charset="-120"/>
               </a:rPr>
-              <a:t>質問し放題は、ご自分の実践についてのご質問にお答えするものです。制作の代行は含みません。</a:t>
+              <a:t>質問し放題は、ご自分の実践についてのご質問にお答えするものです（受講期間中）。制作の代行は含みません。</a:t>
             </a:r>
             <a:endParaRPr lang="en-US" sz="1100" dirty="0"/>
           </a:p>
@@ -7453,7 +7453,7 @@
                 <a:ea typeface="Calibri" pitchFamily="34" charset="-122"/>
                 <a:cs typeface="Calibri" pitchFamily="34" charset="-120"/>
               </a:rPr>
-              <a:t>全コース共通　質問し放題（48時間以内）／会員サイト見放題／アーカイブ視聴可／セルフコーチング／受講生の勉強会／動画撮影会1回</a:t>
+              <a:t>全コース共通　質問し放題（48時間以内）／会員サイトとアーカイブは開講から1年間／セルフコーチング／受講生の勉強会／動画撮影会1回</a:t>
             </a:r>
             <a:endParaRPr lang="en-US" sz="1200" dirty="0"/>
           </a:p>
@@ -7492,7 +7492,7 @@
                 <a:ea typeface="Calibri" pitchFamily="34" charset="-122"/>
                 <a:cs typeface="Calibri" pitchFamily="34" charset="-120"/>
               </a:rPr>
-              <a:t>質問し放題は、ご自分の実践についてのご質問にお答えするものです。制作の代行は含みません。</a:t>
+              <a:t>質問し放題は、ご自分の実践についてのご質問にお答えするものです（受講期間中）。制作の代行は含みません。</a:t>
             </a:r>
             <a:endParaRPr lang="en-US" sz="1100" dirty="0"/>
           </a:p>
@@ -8184,7 +8184,7 @@
                 <a:ea typeface="Calibri" pitchFamily="34" charset="-122"/>
                 <a:cs typeface="Calibri" pitchFamily="34" charset="-120"/>
               </a:rPr>
-              <a:t>全コース共通　質問し放題（48時間以内）／会員サイト見放題／アーカイブ視聴可／セルフコーチング／受講生の勉強会／動画撮影会1回</a:t>
+              <a:t>全コース共通　質問し放題（48時間以内）／会員サイトとアーカイブは開講から1年間／セルフコーチング／受講生の勉強会／動画撮影会1回</a:t>
             </a:r>
             <a:endParaRPr lang="en-US" sz="1200" dirty="0"/>
           </a:p>
@@ -8223,7 +8223,7 @@
                 <a:ea typeface="Calibri" pitchFamily="34" charset="-122"/>
                 <a:cs typeface="Calibri" pitchFamily="34" charset="-120"/>
               </a:rPr>
-              <a:t>質問し放題は、ご自分の実践についてのご質問にお答えするものです。制作の代行は含みません。</a:t>
+              <a:t>質問し放題は、ご自分の実践についてのご質問にお答えするものです（受講期間中）。制作の代行は含みません。</a:t>
             </a:r>
             <a:endParaRPr lang="en-US" sz="1100" dirty="0"/>
           </a:p>
@@ -12624,7 +12624,7 @@
         <p:spPr>
           <a:xfrm>
             <a:off x="6583680" y="4023360"/>
-            <a:ext cx="4846320" cy="2011680"/>
+            <a:ext cx="4846320" cy="2377440"/>
           </a:xfrm>
           <a:prstGeom prst="rect">
             <a:avLst/>
@@ -12651,7 +12651,7 @@
                 <a:ea typeface="Calibri" pitchFamily="34" charset="-122"/>
                 <a:cs typeface="Calibri" pitchFamily="34" charset="-120"/>
               </a:rPr>
-              <a:t>質問し放題（48時間以内）／動画講座の会員サイト見放題</a:t>
+              <a:t>質問し放題（48時間以内・受講期間中）</a:t>
             </a:r>
             <a:endParaRPr lang="en-US" sz="1150" dirty="0"/>
           </a:p>
@@ -12671,7 +12671,27 @@
                 <a:ea typeface="Calibri" pitchFamily="34" charset="-122"/>
                 <a:cs typeface="Calibri" pitchFamily="34" charset="-120"/>
               </a:rPr>
-              <a:t>アーカイブ視聴可／セルフコーチング</a:t>
+              <a:t>動画講座の会員サイトとアーカイブ　開講から1年間 見放題</a:t>
+            </a:r>
+            <a:endParaRPr lang="en-US" sz="1150" dirty="0"/>
+          </a:p>
+          <a:p>
+            <a:pPr indent="0" marL="0">
+              <a:lnSpc>
+                <a:spcPts val="2000"/>
+              </a:lnSpc>
+              <a:buNone/>
+            </a:pPr>
+            <a:r>
+              <a:rPr lang="en-US" sz="1150" dirty="0">
+                <a:solidFill>
+                  <a:srgbClr val="6A5A5E"/>
+                </a:solidFill>
+                <a:latin typeface="Calibri" pitchFamily="34" charset="0"/>
+                <a:ea typeface="Calibri" pitchFamily="34" charset="-122"/>
+                <a:cs typeface="Calibri" pitchFamily="34" charset="-120"/>
+              </a:rPr>
+              <a:t>セルフコーチング</a:t>
             </a:r>
             <a:endParaRPr lang="en-US" sz="1150" dirty="0"/>
           </a:p>
@@ -15609,7 +15629,7 @@
                 <a:ea typeface="Calibri" pitchFamily="34" charset="-122"/>
                 <a:cs typeface="Calibri" pitchFamily="34" charset="-120"/>
               </a:rPr>
-              <a:t>出られない回があっても大丈夫です。すべて録画してアーカイブに残します。動画講座の会員サイトも見放題です。</a:t>
+              <a:t>出られない回があっても大丈夫です。すべて録画してアーカイブに残します。会員サイトとアーカイブは、開講から1年間ご覧いただけます。</a:t>
             </a:r>
             <a:endParaRPr lang="en-US" sz="1400" dirty="0"/>
           </a:p>

--- a/運用/説明会/説明会_3コース_2026年10月期_v2.pptx
+++ b/運用/説明会/説明会_3コース_2026年10月期_v2.pptx
@@ -3375,7 +3375,7 @@
                 <a:ea typeface="Calibri" pitchFamily="34" charset="-122"/>
                 <a:cs typeface="Calibri" pitchFamily="34" charset="-120"/>
               </a:rPr>
-              <a:t>松岡依里子　ファッション心理学者／大学教授</a:t>
+              <a:t>松岡依里子　大学教授／ファッション起業アカデミア主宰</a:t>
             </a:r>
             <a:endParaRPr lang="en-US" sz="1200" dirty="0"/>
           </a:p>
@@ -5763,7 +5763,7 @@
                 <a:ea typeface="Calibri" pitchFamily="34" charset="-122"/>
                 <a:cs typeface="Calibri" pitchFamily="34" charset="-120"/>
               </a:rPr>
-              <a:t>動画講座の会員サイト（開講から1年間）</a:t>
+              <a:t>動画講座の会員サイト（受講期間中）</a:t>
             </a:r>
             <a:endParaRPr lang="en-US" sz="1350" dirty="0"/>
           </a:p>
@@ -6761,7 +6761,7 @@
                 <a:ea typeface="Calibri" pitchFamily="34" charset="-122"/>
                 <a:cs typeface="Calibri" pitchFamily="34" charset="-120"/>
               </a:rPr>
-              <a:t>全コース共通　質問し放題（48時間以内）／会員サイトとアーカイブは開講から1年間／セルフコーチング／受講生の勉強会／動画撮影会1回</a:t>
+              <a:t>全コース共通　質問し放題（48時間以内）／会員サイトとアーカイブ（受講期間中）／セルフコーチング／受講生の勉強会／動画撮影会1回</a:t>
             </a:r>
             <a:endParaRPr lang="en-US" sz="1200" dirty="0"/>
           </a:p>
@@ -7453,7 +7453,7 @@
                 <a:ea typeface="Calibri" pitchFamily="34" charset="-122"/>
                 <a:cs typeface="Calibri" pitchFamily="34" charset="-120"/>
               </a:rPr>
-              <a:t>全コース共通　質問し放題（48時間以内）／会員サイトとアーカイブは開講から1年間／セルフコーチング／受講生の勉強会／動画撮影会1回</a:t>
+              <a:t>全コース共通　質問し放題（48時間以内）／会員サイトとアーカイブ（受講期間中）／セルフコーチング／受講生の勉強会／動画撮影会1回</a:t>
             </a:r>
             <a:endParaRPr lang="en-US" sz="1200" dirty="0"/>
           </a:p>
@@ -8184,7 +8184,7 @@
                 <a:ea typeface="Calibri" pitchFamily="34" charset="-122"/>
                 <a:cs typeface="Calibri" pitchFamily="34" charset="-120"/>
               </a:rPr>
-              <a:t>全コース共通　質問し放題（48時間以内）／会員サイトとアーカイブは開講から1年間／セルフコーチング／受講生の勉強会／動画撮影会1回</a:t>
+              <a:t>全コース共通　質問し放題（48時間以内）／会員サイトとアーカイブ（受講期間中）／セルフコーチング／受講生の勉強会／動画撮影会1回</a:t>
             </a:r>
             <a:endParaRPr lang="en-US" sz="1200" dirty="0"/>
           </a:p>
@@ -11289,7 +11289,7 @@
                 <a:ea typeface="Calibri" pitchFamily="34" charset="-122"/>
                 <a:cs typeface="Calibri" pitchFamily="34" charset="-120"/>
               </a:rPr>
-              <a:t>ファッション心理学者／大学教授・64歳</a:t>
+              <a:t>大学教授／ファッション起業アカデミア主宰・64歳</a:t>
             </a:r>
             <a:endParaRPr lang="en-US" sz="1400" dirty="0"/>
           </a:p>
@@ -12671,7 +12671,7 @@
                 <a:ea typeface="Calibri" pitchFamily="34" charset="-122"/>
                 <a:cs typeface="Calibri" pitchFamily="34" charset="-120"/>
               </a:rPr>
-              <a:t>動画講座の会員サイトとアーカイブ　開講から1年間 見放題</a:t>
+              <a:t>動画講座の会員サイトとアーカイブ　受講期間中 見放題</a:t>
             </a:r>
             <a:endParaRPr lang="en-US" sz="1150" dirty="0"/>
           </a:p>
@@ -15629,7 +15629,7 @@
                 <a:ea typeface="Calibri" pitchFamily="34" charset="-122"/>
                 <a:cs typeface="Calibri" pitchFamily="34" charset="-120"/>
               </a:rPr>
-              <a:t>出られない回があっても大丈夫です。すべて録画してアーカイブに残します。会員サイトとアーカイブは、開講から1年間ご覧いただけます。</a:t>
+              <a:t>出られない回があっても大丈夫です。すべて録画して、受講期間中はいつでもご覧いただけます。</a:t>
             </a:r>
             <a:endParaRPr lang="en-US" sz="1400" dirty="0"/>
           </a:p>

--- a/運用/説明会/説明会_3コース_2026年10月期_v2.pptx
+++ b/運用/説明会/説明会_3コース_2026年10月期_v2.pptx
@@ -3336,7 +3336,7 @@
                 <a:ea typeface="Calibri" pitchFamily="34" charset="-122"/>
                 <a:cs typeface="Calibri" pitchFamily="34" charset="-120"/>
               </a:rPr>
-              <a:t>お申し込み締切　10月14日（水）</a:t>
+              <a:t>お申し込み　随時受付（途中からご参加いただけます）</a:t>
             </a:r>
             <a:endParaRPr lang="en-US" sz="1500" dirty="0"/>
           </a:p>
@@ -15754,7 +15754,7 @@
         <p:spPr>
           <a:xfrm>
             <a:off x="822960" y="3520440"/>
-            <a:ext cx="6766560" cy="2011680"/>
+            <a:ext cx="6766560" cy="2377440"/>
           </a:xfrm>
           <a:prstGeom prst="rect">
             <a:avLst/>
@@ -15830,7 +15830,27 @@
                 <a:ea typeface="Calibri" pitchFamily="34" charset="-122"/>
                 <a:cs typeface="Calibri" pitchFamily="34" charset="-120"/>
               </a:rPr>
-              <a:t>お申し込みの締切は 10月14日（水）です。</a:t>
+              <a:t>お申し込みに締切はありません。</a:t>
+            </a:r>
+            <a:endParaRPr lang="en-US" sz="1600" dirty="0"/>
+          </a:p>
+          <a:p>
+            <a:pPr indent="0" marL="0">
+              <a:lnSpc>
+                <a:spcPts val="3000"/>
+              </a:lnSpc>
+              <a:buNone/>
+            </a:pPr>
+            <a:r>
+              <a:rPr lang="en-US" sz="1600" dirty="0">
+                <a:solidFill>
+                  <a:srgbClr val="332B29"/>
+                </a:solidFill>
+                <a:latin typeface="Calibri" pitchFamily="34" charset="0"/>
+                <a:ea typeface="Calibri" pitchFamily="34" charset="-122"/>
+                <a:cs typeface="Calibri" pitchFamily="34" charset="-120"/>
+              </a:rPr>
+              <a:t>始まってからでも、途中からご参加いただけます。</a:t>
             </a:r>
             <a:endParaRPr lang="en-US" sz="1600" dirty="0"/>
           </a:p>
